--- a/Topic_C/Exam_Practice/TC-L01_Writing_Workshop_People_Places_Compass_Points.pptx
+++ b/Topic_C/Exam_Practice/TC-L01_Writing_Workshop_People_Places_Compass_Points.pptx
@@ -784,7 +784,11 @@
           <a:lstStyle/>
           <a:p>
             <a:r>
-              <a:rPr lang="en-US" dirty="0"/>
+              <a:rPr lang="ar-SA" dirty="0">
+                <a:latin typeface="Amiri" pitchFamily="2" charset="-78"/>
+                <a:ea typeface="Amiri" pitchFamily="2" charset="-78"/>
+                <a:cs typeface="Amiri" pitchFamily="2" charset="-78"/>
+              </a:rPr>
               <a:t>Q3 (3 min to choose and read). Title (أ) suits Core and Develop; title (ب) suits Stretch.</a:t>
             </a:r>
             <a:endParaRPr lang="en-US" dirty="0"/>
@@ -1403,7 +1407,11 @@
           <a:lstStyle/>
           <a:p>
             <a:r>
-              <a:rPr lang="en-US" dirty="0"/>
+              <a:rPr lang="ar-SA" dirty="0">
+                <a:latin typeface="Amiri" pitchFamily="2" charset="-78"/>
+                <a:ea typeface="Amiri" pitchFamily="2" charset="-78"/>
+                <a:cs typeface="Amiri" pitchFamily="2" charset="-78"/>
+              </a:rPr>
               <a:t>WELCOME (1 min) — while students join.
 • Greet each student by name as they arrive: السَّلَامُ عَلَيْكُمْ. Take the register (Pastoral Tracker: attendance 0/1).
 • 2-MINUTE CHECK-IN (SEND training): a private chat to any student who seemed unsettled last lesson — “Are you okay today? 👍 / 👎”.
@@ -1936,7 +1944,11 @@
           <a:lstStyle/>
           <a:p>
             <a:r>
-              <a:rPr lang="en-US" dirty="0"/>
+              <a:rPr lang="ar-SA" dirty="0">
+                <a:latin typeface="Amiri" pitchFamily="2" charset="-78"/>
+                <a:ea typeface="Amiri" pitchFamily="2" charset="-78"/>
+                <a:cs typeface="Amiri" pitchFamily="2" charset="-78"/>
+              </a:rPr>
               <a:t>Question words: أَيْنَ (where) · صِفْ (describe) · مَاذَا (what) · مَا رَأْيُكَ (your opinion) — bullet 2 is a DUAL: ṣadīqayni jadīdayni, jinsiyyatuhumā.</a:t>
             </a:r>
             <a:endParaRPr lang="en-US" dirty="0"/>
@@ -2508,6 +2520,7 @@
                   <a:srgbClr val="D4AF37"/>
                 </a:solidFill>
                 <a:latin typeface="Amiri" pitchFamily="2" charset="-78"/>
+                <a:ea typeface="Amiri" pitchFamily="2" charset="-78"/>
                 <a:cs typeface="Amiri" pitchFamily="2" charset="-78"/>
               </a:rPr>
               <a:t>م</a:t>
@@ -2714,6 +2727,7 @@
                   <a:srgbClr val="D4AF37"/>
                 </a:solidFill>
                 <a:latin typeface="Amiri" pitchFamily="2" charset="-78"/>
+                <a:ea typeface="Amiri" pitchFamily="2" charset="-78"/>
                 <a:cs typeface="Amiri" pitchFamily="2" charset="-78"/>
               </a:rPr>
               <a:t>وَرْشَةُ الكِتَابَةِ — البُلْدَانُ وَالاتِّجَاهَاتُ</a:t>
@@ -3171,6 +3185,7 @@
                   <a:srgbClr val="D4AF37"/>
                 </a:solidFill>
                 <a:latin typeface="Amiri" pitchFamily="2" charset="-78"/>
+                <a:ea typeface="Amiri" pitchFamily="2" charset="-78"/>
                 <a:cs typeface="Amiri" pitchFamily="2" charset="-78"/>
               </a:rPr>
               <a:t>م</a:t>
@@ -3491,6 +3506,7 @@
                   <a:srgbClr val="8A6D1E"/>
                 </a:solidFill>
                 <a:latin typeface="Amiri" pitchFamily="2" charset="-78"/>
+                <a:ea typeface="Amiri" pitchFamily="2" charset="-78"/>
                 <a:cs typeface="Amiri" pitchFamily="2" charset="-78"/>
               </a:rPr>
               <a:t>نَمُوذَجُ الإِجَابَةِ</a:t>
@@ -3604,6 +3620,7 @@
                   <a:srgbClr val="1F2A37"/>
                 </a:solidFill>
                 <a:latin typeface="Amiri" pitchFamily="2" charset="-78"/>
+                <a:ea typeface="Amiri" pitchFamily="2" charset="-78"/>
                 <a:cs typeface="Amiri" pitchFamily="2" charset="-78"/>
               </a:rPr>
               <a:t>مَرْحَبًا يَا كَرِيمُ،</a:t>
@@ -3623,6 +3640,7 @@
                   <a:srgbClr val="1F2A37"/>
                 </a:solidFill>
                 <a:latin typeface="Amiri" pitchFamily="2" charset="-78"/>
+                <a:ea typeface="Amiri" pitchFamily="2" charset="-78"/>
                 <a:cs typeface="Amiri" pitchFamily="2" charset="-78"/>
               </a:rPr>
               <a:t>كَيْفَ حَالُكَ؟ أَنَا الآنَ فِي مُخَيَّمٍ دَوْلِيٍّ فِي اسْكُتْلَنْدَا، فِي شَمَالِ بِرِيطَانِيَا. فِي المُخَيَّمِ شَبَابٌ مِنْ عِشْرِينَ بَلَدًا. صَدِيقِي الجَدِيدُ اسْمُهُ أَمِينٌ، وَهُوَ مَغْرِبِيٌّ مِنْ مَدِينَةِ الرِّبَاطِ، وَهِيَ عَاصِمَةُ المَغْرِبِ. عِنْدِي صَدِيقَةٌ مِصْرِيَّةٌ أَيْضًا اسْمُهَا سَلْمَى. أَمْسِ رَسَمْنَا خَرِيطَةً كَبِيرَةً لِلْعَالَمِ، وَوَضَعَ كُلُّ وَاحِدٍ بَلَدَهُ عَلَيْهَا. المُخَيَّمُ مُمْتِعٌ جِدًّا. فِي الصَّيْفِ القَادِمِ سَأَزُورُ أَمِينًا فِي المَغْرِبِ!</a:t>
@@ -3642,6 +3660,7 @@
                   <a:srgbClr val="1F2A37"/>
                 </a:solidFill>
                 <a:latin typeface="Amiri" pitchFamily="2" charset="-78"/>
+                <a:ea typeface="Amiri" pitchFamily="2" charset="-78"/>
                 <a:cs typeface="Amiri" pitchFamily="2" charset="-78"/>
               </a:rPr>
               <a:t>مَعَ السَّلَامَةِ،</a:t>
@@ -3661,6 +3680,7 @@
                   <a:srgbClr val="1F2A37"/>
                 </a:solidFill>
                 <a:latin typeface="Amiri" pitchFamily="2" charset="-78"/>
+                <a:ea typeface="Amiri" pitchFamily="2" charset="-78"/>
                 <a:cs typeface="Amiri" pitchFamily="2" charset="-78"/>
               </a:rPr>
               <a:t>آدَمُ</a:t>
@@ -3824,11 +3844,12 @@
               <a:buNone/>
             </a:pPr>
             <a:r>
-              <a:rPr lang="en-US" sz="950" b="1" dirty="0">
+              <a:rPr lang="ar-SA" sz="950" b="1" dirty="0">
                 <a:solidFill>
                   <a:srgbClr val="FFFFFF"/>
                 </a:solidFill>
                 <a:latin typeface="Calibri" pitchFamily="34" charset="0"/>
+                <a:ea typeface="Amiri" pitchFamily="2" charset="-78"/>
                 <a:cs typeface="Amiri" pitchFamily="2" charset="-78"/>
               </a:rPr>
               <a:t>فِي شَمَالِ بِرِيطَانِيَا</a:t>
@@ -3889,11 +3910,12 @@
               <a:buNone/>
             </a:pPr>
             <a:r>
-              <a:rPr lang="en-US" sz="950" b="1" dirty="0">
+              <a:rPr lang="ar-SA" sz="950" b="1" dirty="0">
                 <a:solidFill>
                   <a:srgbClr val="FFFFFF"/>
                 </a:solidFill>
                 <a:latin typeface="Calibri" pitchFamily="34" charset="0"/>
+                <a:ea typeface="Amiri" pitchFamily="2" charset="-78"/>
                 <a:cs typeface="Amiri" pitchFamily="2" charset="-78"/>
               </a:rPr>
               <a:t>وَهُوَ مَغْرِبِيٌّ</a:t>
@@ -3954,11 +3976,12 @@
               <a:buNone/>
             </a:pPr>
             <a:r>
-              <a:rPr lang="en-US" sz="950" b="1" dirty="0">
+              <a:rPr lang="ar-SA" sz="950" b="1" dirty="0">
                 <a:solidFill>
                   <a:srgbClr val="FFFFFF"/>
                 </a:solidFill>
                 <a:latin typeface="Calibri" pitchFamily="34" charset="0"/>
+                <a:ea typeface="Amiri" pitchFamily="2" charset="-78"/>
                 <a:cs typeface="Amiri" pitchFamily="2" charset="-78"/>
               </a:rPr>
               <a:t>صَدِيقَةٌ مِصْرِيَّةٌ</a:t>
@@ -4019,11 +4042,12 @@
               <a:buNone/>
             </a:pPr>
             <a:r>
-              <a:rPr lang="en-US" sz="950" b="1" dirty="0">
+              <a:rPr lang="ar-SA" sz="950" b="1" dirty="0">
                 <a:solidFill>
                   <a:srgbClr val="FFFFFF"/>
                 </a:solidFill>
                 <a:latin typeface="Calibri" pitchFamily="34" charset="0"/>
+                <a:ea typeface="Amiri" pitchFamily="2" charset="-78"/>
                 <a:cs typeface="Amiri" pitchFamily="2" charset="-78"/>
               </a:rPr>
               <a:t>سَأَزُورُ</a:t>
@@ -4157,6 +4181,7 @@
                   <a:srgbClr val="D4AF37"/>
                 </a:solidFill>
                 <a:latin typeface="Amiri" pitchFamily="2" charset="-78"/>
+                <a:ea typeface="Amiri" pitchFamily="2" charset="-78"/>
                 <a:cs typeface="Amiri" pitchFamily="2" charset="-78"/>
               </a:rPr>
               <a:t>م</a:t>
@@ -4477,6 +4502,7 @@
                   <a:srgbClr val="8A6D1E"/>
                 </a:solidFill>
                 <a:latin typeface="Amiri" pitchFamily="2" charset="-78"/>
+                <a:ea typeface="Amiri" pitchFamily="2" charset="-78"/>
                 <a:cs typeface="Amiri" pitchFamily="2" charset="-78"/>
               </a:rPr>
               <a:t>نَمُوذَجُ الإِجَابَةِ</a:t>
@@ -4590,6 +4616,7 @@
                   <a:srgbClr val="1F2A37"/>
                 </a:solidFill>
                 <a:latin typeface="Amiri" pitchFamily="2" charset="-78"/>
+                <a:ea typeface="Amiri" pitchFamily="2" charset="-78"/>
                 <a:cs typeface="Amiri" pitchFamily="2" charset="-78"/>
               </a:rPr>
               <a:t>عَزِيزِي كَرِيمٌ،</a:t>
@@ -4609,6 +4636,7 @@
                   <a:srgbClr val="1F2A37"/>
                 </a:solidFill>
                 <a:latin typeface="Amiri" pitchFamily="2" charset="-78"/>
+                <a:ea typeface="Amiri" pitchFamily="2" charset="-78"/>
                 <a:cs typeface="Amiri" pitchFamily="2" charset="-78"/>
               </a:rPr>
               <a:t>تَحِيَّةً طَيِّبَةً، وَبَعْدُ، فَأَنَا أَكْتُبُ إِلَيْكَ مِنْ مُخَيَّمٍ دَوْلِيٍّ لِلشَّبَابِ فِي جِبَالِ اسْكُتْلَنْدَا، فِي أَقْصَى شَمَالِ بِرِيطَانِيَا. يَجْمَعُ المُخَيَّمُ أَكْثَرَ مِنْ مِئَةِ شَابٍّ مِنْ عِشْرِينَ بَلَدًا، وَقَدْ تَعَرَّفْتُ عَلَى أَمِينٍ، وَهُوَ مَغْرِبِيٌّ مِنَ الرِّبَاطِ، وَعَلَى سَلْمَى، وَهِيَ مِصْرِيَّةٌ مِنَ الإِسْكَنْدَرِيَّةِ. أَمْسِ رَسَمْنَا خَرِيطَةً ضَخْمَةً لِلْعَالَمِ، ثُمَّ حَكَى كُلُّ وَاحِدٍ عَنْ بَلَدِهِ، فَاكْتَشَفْتُ أَنَّ المَغْرِبَ أَكْبَرُ مِنْ بِرِيطَانِيَا، لٰكِنَّ عَدَدَ سُكَّانِهِ أَقَلُّ. صَحِيحٌ أَنَّ الجَوَّ هُنَا بَارِدٌ وَمُمْطِرٌ، غَيْرَ أَنَّ الأَصْدِقَاءَ يُدَفِّئُونَ كُلَّ شَيْءٍ. وَإِذَا سَمَحَ لِي وَالِدَايَ، فَسَأَزُورُ أَمِينًا فِي الصَّيْفِ القَادِمِ.</a:t>
@@ -4628,6 +4656,7 @@
                   <a:srgbClr val="1F2A37"/>
                 </a:solidFill>
                 <a:latin typeface="Amiri" pitchFamily="2" charset="-78"/>
+                <a:ea typeface="Amiri" pitchFamily="2" charset="-78"/>
                 <a:cs typeface="Amiri" pitchFamily="2" charset="-78"/>
               </a:rPr>
               <a:t>مَعَ تَحِيَّاتِي،</a:t>
@@ -4647,6 +4676,7 @@
                   <a:srgbClr val="1F2A37"/>
                 </a:solidFill>
                 <a:latin typeface="Amiri" pitchFamily="2" charset="-78"/>
+                <a:ea typeface="Amiri" pitchFamily="2" charset="-78"/>
                 <a:cs typeface="Amiri" pitchFamily="2" charset="-78"/>
               </a:rPr>
               <a:t>آدَمُ</a:t>
@@ -4810,11 +4840,12 @@
               <a:buNone/>
             </a:pPr>
             <a:r>
-              <a:rPr lang="en-US" sz="950" b="1" dirty="0">
+              <a:rPr lang="ar-SA" sz="950" b="1" dirty="0">
                 <a:solidFill>
                   <a:srgbClr val="FFFFFF"/>
                 </a:solidFill>
                 <a:latin typeface="Calibri" pitchFamily="34" charset="0"/>
+                <a:ea typeface="Amiri" pitchFamily="2" charset="-78"/>
                 <a:cs typeface="Amiri" pitchFamily="2" charset="-78"/>
               </a:rPr>
               <a:t>فِي أَقْصَى شَمَالِ</a:t>
@@ -4875,11 +4906,12 @@
               <a:buNone/>
             </a:pPr>
             <a:r>
-              <a:rPr lang="en-US" sz="950" b="1" dirty="0">
+              <a:rPr lang="ar-SA" sz="950" b="1" dirty="0">
                 <a:solidFill>
                   <a:srgbClr val="FFFFFF"/>
                 </a:solidFill>
                 <a:latin typeface="Calibri" pitchFamily="34" charset="0"/>
+                <a:ea typeface="Amiri" pitchFamily="2" charset="-78"/>
                 <a:cs typeface="Amiri" pitchFamily="2" charset="-78"/>
               </a:rPr>
               <a:t>وَهِيَ مِصْرِيَّةٌ</a:t>
@@ -4940,11 +4972,12 @@
               <a:buNone/>
             </a:pPr>
             <a:r>
-              <a:rPr lang="en-US" sz="950" b="1" dirty="0">
+              <a:rPr lang="ar-SA" sz="950" b="1" dirty="0">
                 <a:solidFill>
                   <a:srgbClr val="FFFFFF"/>
                 </a:solidFill>
                 <a:latin typeface="Calibri" pitchFamily="34" charset="0"/>
+                <a:ea typeface="Amiri" pitchFamily="2" charset="-78"/>
                 <a:cs typeface="Amiri" pitchFamily="2" charset="-78"/>
               </a:rPr>
               <a:t>أَكْبَرُ مِنْ … لٰكِنَّ</a:t>
@@ -5005,11 +5038,12 @@
               <a:buNone/>
             </a:pPr>
             <a:r>
-              <a:rPr lang="en-US" sz="950" b="1" dirty="0">
+              <a:rPr lang="ar-SA" sz="950" b="1" dirty="0">
                 <a:solidFill>
                   <a:srgbClr val="FFFFFF"/>
                 </a:solidFill>
                 <a:latin typeface="Calibri" pitchFamily="34" charset="0"/>
+                <a:ea typeface="Amiri" pitchFamily="2" charset="-78"/>
                 <a:cs typeface="Amiri" pitchFamily="2" charset="-78"/>
               </a:rPr>
               <a:t>إِذَا سَمَحَ … فَسَأَزُورُ</a:t>
@@ -5143,6 +5177,7 @@
                   <a:srgbClr val="D4AF37"/>
                 </a:solidFill>
                 <a:latin typeface="Amiri" pitchFamily="2" charset="-78"/>
+                <a:ea typeface="Amiri" pitchFamily="2" charset="-78"/>
                 <a:cs typeface="Amiri" pitchFamily="2" charset="-78"/>
               </a:rPr>
               <a:t>م</a:t>
@@ -5463,6 +5498,7 @@
                   <a:srgbClr val="8A6D1E"/>
                 </a:solidFill>
                 <a:latin typeface="Amiri" pitchFamily="2" charset="-78"/>
+                <a:ea typeface="Amiri" pitchFamily="2" charset="-78"/>
                 <a:cs typeface="Amiri" pitchFamily="2" charset="-78"/>
               </a:rPr>
               <a:t>اخْتَرْ عُنْوَانًا وَاحِدًا</a:t>
@@ -5743,6 +5779,7 @@
                   <a:srgbClr val="1B3B6F"/>
                 </a:solidFill>
                 <a:latin typeface="Amiri" pitchFamily="2" charset="-78"/>
+                <a:ea typeface="Amiri" pitchFamily="2" charset="-78"/>
                 <a:cs typeface="Amiri" pitchFamily="2" charset="-78"/>
               </a:rPr>
               <a:t>جُذُورِي عَلَى الخَرِيطَةِ</a:t>
@@ -5781,6 +5818,7 @@
                   <a:srgbClr val="1B3B6F"/>
                 </a:solidFill>
                 <a:latin typeface="Amiri" pitchFamily="2" charset="-78"/>
+                <a:ea typeface="Amiri" pitchFamily="2" charset="-78"/>
                 <a:cs typeface="Amiri" pitchFamily="2" charset="-78"/>
               </a:rPr>
               <a:t>(أ)</a:t>
@@ -5887,6 +5925,7 @@
                   <a:srgbClr val="1B3B6F"/>
                 </a:solidFill>
                 <a:latin typeface="Amiri" pitchFamily="2" charset="-78"/>
+                <a:ea typeface="Amiri" pitchFamily="2" charset="-78"/>
                 <a:cs typeface="Amiri" pitchFamily="2" charset="-78"/>
               </a:rPr>
               <a:t>أَيْنَ تَسْكُنُ؟ وَأَيْنَ تَقَعُ مَدِينَتُكَ؟ · أَصْلُ عَائِلَتِكَ وَمَكَانُهُ · رِحْلَةٌ إِلَى بَلَدٍ آخَرَ · رَأْيُكَ وَأَحْلَامُكَ</a:t>
@@ -6018,6 +6057,7 @@
                   <a:srgbClr val="1B3B6F"/>
                 </a:solidFill>
                 <a:latin typeface="Amiri" pitchFamily="2" charset="-78"/>
+                <a:ea typeface="Amiri" pitchFamily="2" charset="-78"/>
                 <a:cs typeface="Amiri" pitchFamily="2" charset="-78"/>
               </a:rPr>
               <a:t>العَالَمُ قَرْيَةٌ صَغِيرَةٌ</a:t>
@@ -6056,6 +6096,7 @@
                   <a:srgbClr val="1B3B6F"/>
                 </a:solidFill>
                 <a:latin typeface="Amiri" pitchFamily="2" charset="-78"/>
+                <a:ea typeface="Amiri" pitchFamily="2" charset="-78"/>
                 <a:cs typeface="Amiri" pitchFamily="2" charset="-78"/>
               </a:rPr>
               <a:t>(ب)</a:t>
@@ -6162,6 +6203,7 @@
                   <a:srgbClr val="1B3B6F"/>
                 </a:solidFill>
                 <a:latin typeface="Amiri" pitchFamily="2" charset="-78"/>
+                <a:ea typeface="Amiri" pitchFamily="2" charset="-78"/>
                 <a:cs typeface="Amiri" pitchFamily="2" charset="-78"/>
               </a:rPr>
               <a:t>كَيْفَ أَصْبَحَ العَالَمُ أَقْرَبَ؟ · المَاضِي وَالحَاضِرُ · تَجْرِبَةٌ فِي مَدْرَسَتِكَ أَوْ حَيِّكَ · الإِيجَابِيَّاتُ وَالسَّلْبِيَّاتُ وَاقْتِرَاحُكَ</a:t>
@@ -6361,6 +6403,7 @@
                   <a:srgbClr val="D4AF37"/>
                 </a:solidFill>
                 <a:latin typeface="Amiri" pitchFamily="2" charset="-78"/>
+                <a:ea typeface="Amiri" pitchFamily="2" charset="-78"/>
                 <a:cs typeface="Amiri" pitchFamily="2" charset="-78"/>
               </a:rPr>
               <a:t>م</a:t>
@@ -6681,6 +6724,7 @@
                   <a:srgbClr val="8A6D1E"/>
                 </a:solidFill>
                 <a:latin typeface="Amiri" pitchFamily="2" charset="-78"/>
+                <a:ea typeface="Amiri" pitchFamily="2" charset="-78"/>
                 <a:cs typeface="Amiri" pitchFamily="2" charset="-78"/>
               </a:rPr>
               <a:t>خُطَّةُ الكِتَابَةِ</a:t>
@@ -7305,6 +7349,7 @@
                   <a:srgbClr val="1B3B6F"/>
                 </a:solidFill>
                 <a:latin typeface="Amiri" pitchFamily="2" charset="-78"/>
+                <a:ea typeface="Amiri" pitchFamily="2" charset="-78"/>
                 <a:cs typeface="Amiri" pitchFamily="2" charset="-78"/>
               </a:rPr>
               <a:t>تَقَعُ مَدِينَتِي فِي وَسَطِ إِنْجِلْتِرَا.</a:t>
@@ -7404,6 +7449,7 @@
                   <a:srgbClr val="1B3B6F"/>
                 </a:solidFill>
                 <a:latin typeface="Amiri" pitchFamily="2" charset="-78"/>
+                <a:ea typeface="Amiri" pitchFamily="2" charset="-78"/>
                 <a:cs typeface="Amiri" pitchFamily="2" charset="-78"/>
               </a:rPr>
               <a:t>زُرْنَا مَسْقَطَ، وَهِيَ عَاصِمَةُ عُمَانَ.</a:t>
@@ -7503,6 +7549,7 @@
                   <a:srgbClr val="1B3B6F"/>
                 </a:solidFill>
                 <a:latin typeface="Amiri" pitchFamily="2" charset="-78"/>
+                <a:ea typeface="Amiri" pitchFamily="2" charset="-78"/>
                 <a:cs typeface="Amiri" pitchFamily="2" charset="-78"/>
               </a:rPr>
               <a:t>سَأَزُورُ قَرْيَةَ جَدِّي فِي الجِبَالِ.</a:t>
@@ -7664,6 +7711,7 @@
                   <a:srgbClr val="1F2A37"/>
                 </a:solidFill>
                 <a:latin typeface="Amiri" pitchFamily="2" charset="-78"/>
+                <a:ea typeface="Amiri" pitchFamily="2" charset="-78"/>
                 <a:cs typeface="Amiri" pitchFamily="2" charset="-78"/>
               </a:rPr>
               <a:t>أ</a:t>
@@ -7690,6 +7738,7 @@
                   <a:srgbClr val="1F2A37"/>
                 </a:solidFill>
                 <a:latin typeface="Amiri" pitchFamily="2" charset="-78"/>
+                <a:ea typeface="Amiri" pitchFamily="2" charset="-78"/>
                 <a:cs typeface="Amiri" pitchFamily="2" charset="-78"/>
               </a:rPr>
               <a:t>ب</a:t>
@@ -7836,6 +7885,7 @@
                   <a:srgbClr val="D4AF37"/>
                 </a:solidFill>
                 <a:latin typeface="Amiri" pitchFamily="2" charset="-78"/>
+                <a:ea typeface="Amiri" pitchFamily="2" charset="-78"/>
                 <a:cs typeface="Amiri" pitchFamily="2" charset="-78"/>
               </a:rPr>
               <a:t>م</a:t>
@@ -8093,6 +8143,7 @@
                   <a:srgbClr val="8A6D1E"/>
                 </a:solidFill>
                 <a:latin typeface="Amiri" pitchFamily="2" charset="-78"/>
+                <a:ea typeface="Amiri" pitchFamily="2" charset="-78"/>
                 <a:cs typeface="Amiri" pitchFamily="2" charset="-78"/>
               </a:rPr>
               <a:t>أ</a:t>
@@ -8157,6 +8208,7 @@
                   <a:srgbClr val="1B3B6F"/>
                 </a:solidFill>
                 <a:latin typeface="Amiri" pitchFamily="2" charset="-78"/>
+                <a:ea typeface="Amiri" pitchFamily="2" charset="-78"/>
                 <a:cs typeface="Amiri" pitchFamily="2" charset="-78"/>
               </a:rPr>
               <a:t>أ</a:t>
@@ -8208,6 +8260,7 @@
                   <a:srgbClr val="8A6D1E"/>
                 </a:solidFill>
                 <a:latin typeface="Amiri" pitchFamily="2" charset="-78"/>
+                <a:ea typeface="Amiri" pitchFamily="2" charset="-78"/>
                 <a:cs typeface="Amiri" pitchFamily="2" charset="-78"/>
               </a:rPr>
               <a:t>نَمُوذَجُ الإِجَابَةِ</a:t>
@@ -8321,6 +8374,7 @@
                   <a:srgbClr val="1F2A37"/>
                 </a:solidFill>
                 <a:latin typeface="Amiri" pitchFamily="2" charset="-78"/>
+                <a:ea typeface="Amiri" pitchFamily="2" charset="-78"/>
                 <a:cs typeface="Amiri" pitchFamily="2" charset="-78"/>
               </a:rPr>
               <a:t>أَسْكُنُ فِي مَدِينَةِ بِرْمِنْغْهَامَ، وَهِيَ تَقَعُ فِي وَسَطِ إِنْجِلْتِرَا. مَدِينَتِي كَبِيرَةٌ، وَسُكَّانُهَا مِنْ بُلْدَانٍ كَثِيرَةٍ. فِي صَفِّي طُلَّابٌ بَاكِسْتَانِيُّونَ وَصُومَالِيُّونَ وَيَمَنِيُّونَ وَبُولَنْدِيُّونَ، وَنَتَكَلَّمُ أَكْثَرَ مِنْ عَشْرِ لُغَاتٍ!</a:t>
@@ -8340,6 +8394,7 @@
                   <a:srgbClr val="1F2A37"/>
                 </a:solidFill>
                 <a:latin typeface="Amiri" pitchFamily="2" charset="-78"/>
+                <a:ea typeface="Amiri" pitchFamily="2" charset="-78"/>
                 <a:cs typeface="Amiri" pitchFamily="2" charset="-78"/>
               </a:rPr>
               <a:t>أَنَا بِرِيطَانِيٌّ، لٰكِنَّ أَصْلَ عَائِلَتِي مِنَ اليَمَنِ. اليَمَنُ يَقَعُ فِي جَنُوبِ شِبْهِ الجَزِيرَةِ العَرَبِيَّةِ، وَعَاصِمَتُهُ صَنْعَاءُ. فِي الشَّمَالِ تَقَعُ السُّعُودِيَّةُ، وَفِي الشَّرْقِ تَقَعُ عُمَانُ، وَفِي الغَرْبِ البَحْرُ الأَحْمَرُ.</a:t>
@@ -8359,6 +8414,7 @@
                   <a:srgbClr val="1F2A37"/>
                 </a:solidFill>
                 <a:latin typeface="Amiri" pitchFamily="2" charset="-78"/>
+                <a:ea typeface="Amiri" pitchFamily="2" charset="-78"/>
                 <a:cs typeface="Amiri" pitchFamily="2" charset="-78"/>
               </a:rPr>
               <a:t>فِي الصَّيْفِ المَاضِي سَافَرْتُ مَعَ أَبِي إِلَى عُمَانَ، لِأَنَّ اليَمَنَ صَعْبٌ الآنَ. زُرْنَا مَسْقَطَ، وَهِيَ عَاصِمَةُ عُمَانَ، وَرَأَيْنَا البَحْرَ وَالجِبَالَ. كَانَ الجَوُّ حَارًّا جِدًّا، لٰكِنَّ النَّاسَ كَانُوا لُطَفَاءَ، وَأَكَلْنَا المَنْدِيَ وَالحَلْوَى العُمَانِيَّةَ.</a:t>
@@ -8378,6 +8434,7 @@
                   <a:srgbClr val="1F2A37"/>
                 </a:solidFill>
                 <a:latin typeface="Amiri" pitchFamily="2" charset="-78"/>
+                <a:ea typeface="Amiri" pitchFamily="2" charset="-78"/>
                 <a:cs typeface="Amiri" pitchFamily="2" charset="-78"/>
               </a:rPr>
               <a:t>فِي رَأْيِي، مِنَ المُهِمِّ أَنْ نَعْرِفَ بُلْدَانَ العَالَمِ. فِي المُسْتَقْبَلِ أُرِيدُ أَنْ أَزُورَ اليَمَنَ، وَسَأَرَى قَرْيَةَ جَدِّي فِي الجِبَالِ، لِأَنَّ أَبِي يَتَكَلَّمُ عَنْهَا دَائِمًا.</a:t>
@@ -8541,11 +8598,12 @@
               <a:buNone/>
             </a:pPr>
             <a:r>
-              <a:rPr lang="en-US" sz="950" b="1" dirty="0">
+              <a:rPr lang="ar-SA" sz="950" b="1" dirty="0">
                 <a:solidFill>
                   <a:srgbClr val="FFFFFF"/>
                 </a:solidFill>
                 <a:latin typeface="Calibri" pitchFamily="34" charset="0"/>
+                <a:ea typeface="Amiri" pitchFamily="2" charset="-78"/>
                 <a:cs typeface="Amiri" pitchFamily="2" charset="-78"/>
               </a:rPr>
               <a:t>تَقَعُ فِي وَسَطِ</a:t>
@@ -8606,11 +8664,12 @@
               <a:buNone/>
             </a:pPr>
             <a:r>
-              <a:rPr lang="en-US" sz="950" b="1" dirty="0">
+              <a:rPr lang="ar-SA" sz="950" b="1" dirty="0">
                 <a:solidFill>
                   <a:srgbClr val="FFFFFF"/>
                 </a:solidFill>
                 <a:latin typeface="Calibri" pitchFamily="34" charset="0"/>
+                <a:ea typeface="Amiri" pitchFamily="2" charset="-78"/>
                 <a:cs typeface="Amiri" pitchFamily="2" charset="-78"/>
               </a:rPr>
               <a:t>يَمَنِيُّونَ</a:t>
@@ -8671,11 +8730,12 @@
               <a:buNone/>
             </a:pPr>
             <a:r>
-              <a:rPr lang="en-US" sz="950" b="1" dirty="0">
+              <a:rPr lang="ar-SA" sz="950" b="1" dirty="0">
                 <a:solidFill>
                   <a:srgbClr val="FFFFFF"/>
                 </a:solidFill>
                 <a:latin typeface="Calibri" pitchFamily="34" charset="0"/>
+                <a:ea typeface="Amiri" pitchFamily="2" charset="-78"/>
                 <a:cs typeface="Amiri" pitchFamily="2" charset="-78"/>
               </a:rPr>
               <a:t>فِي الشَّمَالِ تَقَعُ</a:t>
@@ -8736,11 +8796,12 @@
               <a:buNone/>
             </a:pPr>
             <a:r>
-              <a:rPr lang="en-US" sz="950" b="1" dirty="0">
+              <a:rPr lang="ar-SA" sz="950" b="1" dirty="0">
                 <a:solidFill>
                   <a:srgbClr val="FFFFFF"/>
                 </a:solidFill>
                 <a:latin typeface="Calibri" pitchFamily="34" charset="0"/>
+                <a:ea typeface="Amiri" pitchFamily="2" charset="-78"/>
                 <a:cs typeface="Amiri" pitchFamily="2" charset="-78"/>
               </a:rPr>
               <a:t>سَأَرَى</a:t>
@@ -8874,6 +8935,7 @@
                   <a:srgbClr val="D4AF37"/>
                 </a:solidFill>
                 <a:latin typeface="Amiri" pitchFamily="2" charset="-78"/>
+                <a:ea typeface="Amiri" pitchFamily="2" charset="-78"/>
                 <a:cs typeface="Amiri" pitchFamily="2" charset="-78"/>
               </a:rPr>
               <a:t>م</a:t>
@@ -9131,6 +9193,7 @@
                   <a:srgbClr val="8A6D1E"/>
                 </a:solidFill>
                 <a:latin typeface="Amiri" pitchFamily="2" charset="-78"/>
+                <a:ea typeface="Amiri" pitchFamily="2" charset="-78"/>
                 <a:cs typeface="Amiri" pitchFamily="2" charset="-78"/>
               </a:rPr>
               <a:t>أ</a:t>
@@ -9195,6 +9258,7 @@
                   <a:srgbClr val="1B3B6F"/>
                 </a:solidFill>
                 <a:latin typeface="Amiri" pitchFamily="2" charset="-78"/>
+                <a:ea typeface="Amiri" pitchFamily="2" charset="-78"/>
                 <a:cs typeface="Amiri" pitchFamily="2" charset="-78"/>
               </a:rPr>
               <a:t>أ</a:t>
@@ -9246,6 +9310,7 @@
                   <a:srgbClr val="8A6D1E"/>
                 </a:solidFill>
                 <a:latin typeface="Amiri" pitchFamily="2" charset="-78"/>
+                <a:ea typeface="Amiri" pitchFamily="2" charset="-78"/>
                 <a:cs typeface="Amiri" pitchFamily="2" charset="-78"/>
               </a:rPr>
               <a:t>نَمُوذَجُ الإِجَابَةِ</a:t>
@@ -9359,6 +9424,7 @@
                   <a:srgbClr val="1F2A37"/>
                 </a:solidFill>
                 <a:latin typeface="Amiri" pitchFamily="2" charset="-78"/>
+                <a:ea typeface="Amiri" pitchFamily="2" charset="-78"/>
                 <a:cs typeface="Amiri" pitchFamily="2" charset="-78"/>
               </a:rPr>
               <a:t>عَلَى جِدَارِ غُرْفَتِي خَرِيطَةٌ كَبِيرَةٌ لِلْعَالَمِ، وَعَلَيْهَا دَبَابِيسُ حَمْرَاءُ فِي كُلِّ مَكَانٍ زُرْتُهُ، وَدَبَابِيسُ زَرْقَاءُ فِي الأَمَاكِنِ الَّتِي أَحْلُمُ بِزِيَارَتِهَا. وَأَهَمُّ دَبُّوسٍ فِيهَا هُوَ الَّذِي وَضَعْتُهُ عَلَى صَنْعَاءَ، فِي جَنُوبِ شِبْهِ الجَزِيرَةِ العَرَبِيَّةِ.</a:t>
@@ -9378,6 +9444,7 @@
                   <a:srgbClr val="1F2A37"/>
                 </a:solidFill>
                 <a:latin typeface="Amiri" pitchFamily="2" charset="-78"/>
+                <a:ea typeface="Amiri" pitchFamily="2" charset="-78"/>
                 <a:cs typeface="Amiri" pitchFamily="2" charset="-78"/>
               </a:rPr>
               <a:t>أَنَا بِرِيطَانِيٌّ وُلِدْتُ فِي بِرْمِنْغْهَامَ، فِي وَسَطِ إِنْجِلْتِرَا، أَمَّا أَبِي فَيَمَنِيٌّ جَاءَ إِلَى بِرِيطَانِيَا قَبْلَ عِشْرِينَ سَنَةً. وَلِذٰلِكَ أَشْعُرُ أَنَّ لِي مَدِينَتَيْنِ: وَاحِدَةً أَعِيشُ فِيهَا، وَأُخْرَى أَسْمَعُ عَنْهَا فِي قِصَصِ أَبِي كُلَّ مَسَاءٍ.</a:t>
@@ -9397,6 +9464,7 @@
                   <a:srgbClr val="1F2A37"/>
                 </a:solidFill>
                 <a:latin typeface="Amiri" pitchFamily="2" charset="-78"/>
+                <a:ea typeface="Amiri" pitchFamily="2" charset="-78"/>
                 <a:cs typeface="Amiri" pitchFamily="2" charset="-78"/>
               </a:rPr>
               <a:t>فِي الصَّيْفِ المَاضِي اقْتَرَبْتُ مِنْهَا أَكْثَرَ مِنْ أَيِّ وَقْتٍ مَضَى؛ فَقَدْ سَافَرْنَا إِلَى عُمَانَ، الَّتِي تَقَعُ شَرْقَ اليَمَنِ، وَهُنَاكَ الْتَقَيْتُ بِأَعْمَامِي لِأَوَّلِ مَرَّةٍ. فُوجِئْتُ بِأَنَّ لَهَجَاتِنَا مُخْتَلِفَةٌ، لٰكِنَّ ضَحَكَاتِنَا مُتَشَابِهَةٌ تَمَامًا.</a:t>
@@ -9416,6 +9484,7 @@
                   <a:srgbClr val="1F2A37"/>
                 </a:solidFill>
                 <a:latin typeface="Amiri" pitchFamily="2" charset="-78"/>
+                <a:ea typeface="Amiri" pitchFamily="2" charset="-78"/>
                 <a:cs typeface="Amiri" pitchFamily="2" charset="-78"/>
               </a:rPr>
               <a:t>صَحِيحٌ أَنِّي لَمْ أَزُرْ صَنْعَاءَ بَعْدُ، غَيْرَ أَنَّ الخَرِيطَةَ عَلَّمَتْنِي أَنَّ المَسَافَاتِ لَا تَقْطَعُ الجُذُورَ. وَلَوْ سَمَحَتِ الظُّرُوفُ فِي المُسْتَقْبَلِ، لَكَانَتْ أَوَّلُ رِحْلَةٍ أَقُومُ بِهَا وَحْدِي إِلَى قَرْيَةِ جَدِّي فِي الجِبَالِ، لِأَضَعَ دَبُّوسًا أَحْمَرَ أَخِيرًا.</a:t>
@@ -9514,11 +9583,12 @@
               <a:buNone/>
             </a:pPr>
             <a:r>
-              <a:rPr lang="en-US" sz="950" b="1" dirty="0">
+              <a:rPr lang="ar-SA" sz="950" b="1" dirty="0">
                 <a:solidFill>
                   <a:srgbClr val="FFFFFF"/>
                 </a:solidFill>
                 <a:latin typeface="Calibri" pitchFamily="34" charset="0"/>
+                <a:ea typeface="Amiri" pitchFamily="2" charset="-78"/>
                 <a:cs typeface="Amiri" pitchFamily="2" charset="-78"/>
               </a:rPr>
               <a:t>الَّتِي أَحْلُمُ بِزِيَارَتِهَا</a:t>
@@ -9579,11 +9649,12 @@
               <a:buNone/>
             </a:pPr>
             <a:r>
-              <a:rPr lang="en-US" sz="950" b="1" dirty="0">
+              <a:rPr lang="ar-SA" sz="950" b="1" dirty="0">
                 <a:solidFill>
                   <a:srgbClr val="FFFFFF"/>
                 </a:solidFill>
                 <a:latin typeface="Calibri" pitchFamily="34" charset="0"/>
+                <a:ea typeface="Amiri" pitchFamily="2" charset="-78"/>
                 <a:cs typeface="Amiri" pitchFamily="2" charset="-78"/>
               </a:rPr>
               <a:t>أَمَّا أَبِي فَيَمَنِيٌّ</a:t>
@@ -9644,11 +9715,12 @@
               <a:buNone/>
             </a:pPr>
             <a:r>
-              <a:rPr lang="en-US" sz="950" b="1" dirty="0">
+              <a:rPr lang="ar-SA" sz="950" b="1" dirty="0">
                 <a:solidFill>
                   <a:srgbClr val="FFFFFF"/>
                 </a:solidFill>
                 <a:latin typeface="Calibri" pitchFamily="34" charset="0"/>
+                <a:ea typeface="Amiri" pitchFamily="2" charset="-78"/>
                 <a:cs typeface="Amiri" pitchFamily="2" charset="-78"/>
               </a:rPr>
               <a:t>الَّتِي تَقَعُ شَرْقَ اليَمَنِ</a:t>
@@ -9709,11 +9781,12 @@
               <a:buNone/>
             </a:pPr>
             <a:r>
-              <a:rPr lang="en-US" sz="950" b="1" dirty="0">
+              <a:rPr lang="ar-SA" sz="950" b="1" dirty="0">
                 <a:solidFill>
                   <a:srgbClr val="FFFFFF"/>
                 </a:solidFill>
                 <a:latin typeface="Calibri" pitchFamily="34" charset="0"/>
+                <a:ea typeface="Amiri" pitchFamily="2" charset="-78"/>
                 <a:cs typeface="Amiri" pitchFamily="2" charset="-78"/>
               </a:rPr>
               <a:t>لَوْ سَمَحَتِ … لَكَانَتْ</a:t>
@@ -9847,6 +9920,7 @@
                   <a:srgbClr val="D4AF37"/>
                 </a:solidFill>
                 <a:latin typeface="Amiri" pitchFamily="2" charset="-78"/>
+                <a:ea typeface="Amiri" pitchFamily="2" charset="-78"/>
                 <a:cs typeface="Amiri" pitchFamily="2" charset="-78"/>
               </a:rPr>
               <a:t>م</a:t>
@@ -10104,6 +10178,7 @@
                   <a:srgbClr val="8A6D1E"/>
                 </a:solidFill>
                 <a:latin typeface="Amiri" pitchFamily="2" charset="-78"/>
+                <a:ea typeface="Amiri" pitchFamily="2" charset="-78"/>
                 <a:cs typeface="Amiri" pitchFamily="2" charset="-78"/>
               </a:rPr>
               <a:t>ب</a:t>
@@ -10168,6 +10243,7 @@
                   <a:srgbClr val="1B3B6F"/>
                 </a:solidFill>
                 <a:latin typeface="Amiri" pitchFamily="2" charset="-78"/>
+                <a:ea typeface="Amiri" pitchFamily="2" charset="-78"/>
                 <a:cs typeface="Amiri" pitchFamily="2" charset="-78"/>
               </a:rPr>
               <a:t>ب</a:t>
@@ -10219,6 +10295,7 @@
                   <a:srgbClr val="8A6D1E"/>
                 </a:solidFill>
                 <a:latin typeface="Amiri" pitchFamily="2" charset="-78"/>
+                <a:ea typeface="Amiri" pitchFamily="2" charset="-78"/>
                 <a:cs typeface="Amiri" pitchFamily="2" charset="-78"/>
               </a:rPr>
               <a:t>نَمُوذَجُ الإِجَابَةِ</a:t>
@@ -10332,6 +10409,7 @@
                   <a:srgbClr val="1F2A37"/>
                 </a:solidFill>
                 <a:latin typeface="Amiri" pitchFamily="2" charset="-78"/>
+                <a:ea typeface="Amiri" pitchFamily="2" charset="-78"/>
                 <a:cs typeface="Amiri" pitchFamily="2" charset="-78"/>
               </a:rPr>
               <a:t>يُقَالُ إِنَّ العَالَمَ أَصْبَحَ قَرْيَةً صَغِيرَةً، وَهٰذَا صَحِيحٌ إِلَى حَدٍّ كَبِيرٍ؛ فَنَسْتَطِيعُ أَنْ نُكَلِّمَ صَدِيقًا فِي أُسْتُرَالْيَا، وَنَشْتَرِيَ مُنْتَجًا مِنَ الصِّينِ، وَنُشَاهِدَ أَخْبَارَ المَغْرِبِ، وَنَحْنُ جَالِسُونَ فِي غُرْفَتِنَا، وَكُلُّ ذٰلِكَ فِي أَقَلَّ مِنْ سَاعَةٍ.</a:t>
@@ -10351,6 +10429,7 @@
                   <a:srgbClr val="1F2A37"/>
                 </a:solidFill>
                 <a:latin typeface="Amiri" pitchFamily="2" charset="-78"/>
+                <a:ea typeface="Amiri" pitchFamily="2" charset="-78"/>
                 <a:cs typeface="Amiri" pitchFamily="2" charset="-78"/>
               </a:rPr>
               <a:t>فِي المَاضِي كَانَ أَغْلَبُ النَّاسِ يَعِيشُونَ وَيَمُوتُونَ فِي المِنْطَقَةِ الَّتِي وُلِدُوا فِيهَا، وَلَا يَعْرِفُونَ عَنِ البُلْدَانِ البَعِيدَةِ إِلَّا القَلِيلَ، أَمَّا اليَوْمَ فَيَجْلِسُ فِي صَفٍّ وَاحِدٍ طُلَّابٌ مِنْ خَمْسِ قَارَّاتٍ، يَتَكَلَّمُونَ لُغَاتٍ مُخْتَلِفَةً فِي بُيُوتِهِمْ.</a:t>
@@ -10370,6 +10449,7 @@
                   <a:srgbClr val="1F2A37"/>
                 </a:solidFill>
                 <a:latin typeface="Amiri" pitchFamily="2" charset="-78"/>
+                <a:ea typeface="Amiri" pitchFamily="2" charset="-78"/>
                 <a:cs typeface="Amiri" pitchFamily="2" charset="-78"/>
               </a:rPr>
               <a:t>وَأَنَا أَرَى ذٰلِكَ كُلَّ يَوْمٍ؛ فَفِي العَامِ المَاضِي نَظَّمَتْ مَدْرَسَتِي «يَوْمَ الخَرِيطَةِ»، فَوَضَعَ كُلُّ طَالِبٍ دَبُّوسًا عَلَى بَلَدِ عَائِلَتِهِ، فَوَجَدْنَا أَكْثَرَ مِنْ أَرْبَعِينَ بَلَدًا، مِنْ شَمَالِ أُورُوبَّا إِلَى جَنُوبِ إِفْرِيقْيَا، ثُمَّ تَذَوَّقْنَا أَطْبَاقًا مِنْ كُلِّ قَارَّةٍ.</a:t>
@@ -10389,6 +10469,7 @@
                   <a:srgbClr val="1F2A37"/>
                 </a:solidFill>
                 <a:latin typeface="Amiri" pitchFamily="2" charset="-78"/>
+                <a:ea typeface="Amiri" pitchFamily="2" charset="-78"/>
                 <a:cs typeface="Amiri" pitchFamily="2" charset="-78"/>
               </a:rPr>
               <a:t>صَحِيحٌ أَنَّ هٰذَا التَّقَارُبَ يُسَهِّلُ التِّجَارَةَ وَالتَّعَلُّمَ، غَيْرَ أَنَّهُ قَدْ يَجْعَلُ الثَّقَافَاتِ المَحَلِّيَّةَ وَاللُّغَاتِ الصَّغِيرَةَ تَخْتَفِي. وَلَوْ تَعَلَّمَ كُلُّ طَالِبٍ لُغَةَ بَلَدٍ آخَرَ، لَأَصْبَحَتْ هٰذِهِ القَرْيَةُ أَكْثَرَ تَفَاهُمًا وَاحْتِرَامًا.</a:t>
@@ -10487,11 +10568,12 @@
               <a:buNone/>
             </a:pPr>
             <a:r>
-              <a:rPr lang="en-US" sz="950" b="1" dirty="0">
+              <a:rPr lang="ar-SA" sz="950" b="1" dirty="0">
                 <a:solidFill>
                   <a:srgbClr val="FFFFFF"/>
                 </a:solidFill>
                 <a:latin typeface="Calibri" pitchFamily="34" charset="0"/>
+                <a:ea typeface="Amiri" pitchFamily="2" charset="-78"/>
                 <a:cs typeface="Amiri" pitchFamily="2" charset="-78"/>
               </a:rPr>
               <a:t>وَنَحْنُ جَالِسُونَ</a:t>
@@ -10552,11 +10634,12 @@
               <a:buNone/>
             </a:pPr>
             <a:r>
-              <a:rPr lang="en-US" sz="950" b="1" dirty="0">
+              <a:rPr lang="ar-SA" sz="950" b="1" dirty="0">
                 <a:solidFill>
                   <a:srgbClr val="FFFFFF"/>
                 </a:solidFill>
                 <a:latin typeface="Calibri" pitchFamily="34" charset="0"/>
+                <a:ea typeface="Amiri" pitchFamily="2" charset="-78"/>
                 <a:cs typeface="Amiri" pitchFamily="2" charset="-78"/>
               </a:rPr>
               <a:t>أَمَّا اليَوْمَ فَيَجْلِسُ</a:t>
@@ -10617,11 +10700,12 @@
               <a:buNone/>
             </a:pPr>
             <a:r>
-              <a:rPr lang="en-US" sz="950" b="1" dirty="0">
+              <a:rPr lang="ar-SA" sz="950" b="1" dirty="0">
                 <a:solidFill>
                   <a:srgbClr val="FFFFFF"/>
                 </a:solidFill>
                 <a:latin typeface="Calibri" pitchFamily="34" charset="0"/>
+                <a:ea typeface="Amiri" pitchFamily="2" charset="-78"/>
                 <a:cs typeface="Amiri" pitchFamily="2" charset="-78"/>
               </a:rPr>
               <a:t>مِنْ شَمَالِ أُورُوبَّا إِلَى جَنُوبِ</a:t>
@@ -10682,11 +10766,12 @@
               <a:buNone/>
             </a:pPr>
             <a:r>
-              <a:rPr lang="en-US" sz="950" b="1" dirty="0">
+              <a:rPr lang="ar-SA" sz="950" b="1" dirty="0">
                 <a:solidFill>
                   <a:srgbClr val="FFFFFF"/>
                 </a:solidFill>
                 <a:latin typeface="Calibri" pitchFamily="34" charset="0"/>
+                <a:ea typeface="Amiri" pitchFamily="2" charset="-78"/>
                 <a:cs typeface="Amiri" pitchFamily="2" charset="-78"/>
               </a:rPr>
               <a:t>لَوْ تَعَلَّمَ … لَأَصْبَحَتْ</a:t>
@@ -10820,6 +10905,7 @@
                   <a:srgbClr val="D4AF37"/>
                 </a:solidFill>
                 <a:latin typeface="Amiri" pitchFamily="2" charset="-78"/>
+                <a:ea typeface="Amiri" pitchFamily="2" charset="-78"/>
                 <a:cs typeface="Amiri" pitchFamily="2" charset="-78"/>
               </a:rPr>
               <a:t>م</a:t>
@@ -11140,6 +11226,7 @@
                   <a:srgbClr val="8A6D1E"/>
                 </a:solidFill>
                 <a:latin typeface="Amiri" pitchFamily="2" charset="-78"/>
+                <a:ea typeface="Amiri" pitchFamily="2" charset="-78"/>
                 <a:cs typeface="Amiri" pitchFamily="2" charset="-78"/>
               </a:rPr>
               <a:t>قَيِّمْ عَمَلَكَ</a:t>
@@ -12384,6 +12471,7 @@
                   <a:srgbClr val="FFFFFF"/>
                 </a:solidFill>
                 <a:latin typeface="Amiri" pitchFamily="2" charset="-78"/>
+                <a:ea typeface="Amiri" pitchFamily="2" charset="-78"/>
                 <a:cs typeface="Amiri" pitchFamily="2" charset="-78"/>
               </a:rPr>
               <a:t>أَحْسَنْتُمْ! إِلَى اللِّقَاءِ</a:t>
@@ -12536,6 +12624,7 @@
                   <a:srgbClr val="D4AF37"/>
                 </a:solidFill>
                 <a:latin typeface="Amiri" pitchFamily="2" charset="-78"/>
+                <a:ea typeface="Amiri" pitchFamily="2" charset="-78"/>
                 <a:cs typeface="Amiri" pitchFamily="2" charset="-78"/>
               </a:rPr>
               <a:t>وَرْشَةُ التَّدْرِيبِ</a:t>
@@ -12669,6 +12758,7 @@
                   <a:srgbClr val="D4AF37"/>
                 </a:solidFill>
                 <a:latin typeface="Amiri" pitchFamily="2" charset="-78"/>
+                <a:ea typeface="Amiri" pitchFamily="2" charset="-78"/>
                 <a:cs typeface="Amiri" pitchFamily="2" charset="-78"/>
               </a:rPr>
               <a:t>م</a:t>
@@ -12989,6 +13079,7 @@
                   <a:srgbClr val="8A6D1E"/>
                 </a:solidFill>
                 <a:latin typeface="Amiri" pitchFamily="2" charset="-78"/>
+                <a:ea typeface="Amiri" pitchFamily="2" charset="-78"/>
                 <a:cs typeface="Amiri" pitchFamily="2" charset="-78"/>
               </a:rPr>
               <a:t>آدَابُ الصَّفِّ</a:t>
@@ -14520,6 +14611,7 @@
                   <a:srgbClr val="D4AF37"/>
                 </a:solidFill>
                 <a:latin typeface="Amiri" pitchFamily="2" charset="-78"/>
+                <a:ea typeface="Amiri" pitchFamily="2" charset="-78"/>
                 <a:cs typeface="Amiri" pitchFamily="2" charset="-78"/>
               </a:rPr>
               <a:t>م</a:t>
@@ -14840,6 +14932,7 @@
                   <a:srgbClr val="8A6D1E"/>
                 </a:solidFill>
                 <a:latin typeface="Amiri" pitchFamily="2" charset="-78"/>
+                <a:ea typeface="Amiri" pitchFamily="2" charset="-78"/>
                 <a:cs typeface="Amiri" pitchFamily="2" charset="-78"/>
               </a:rPr>
               <a:t>خَرِيطَةُ الوَرْشَةِ</a:t>
@@ -15154,6 +15247,7 @@
                   <a:srgbClr val="1B3B6F"/>
                 </a:solidFill>
                 <a:latin typeface="Amiri" pitchFamily="2" charset="-78"/>
+                <a:ea typeface="Amiri" pitchFamily="2" charset="-78"/>
                 <a:cs typeface="Amiri" pitchFamily="2" charset="-78"/>
               </a:rPr>
               <a:t>كَيْفَ</a:t>
@@ -15430,6 +15524,7 @@
                   <a:srgbClr val="1E6B52"/>
                 </a:solidFill>
                 <a:latin typeface="Amiri" pitchFamily="2" charset="-78"/>
+                <a:ea typeface="Amiri" pitchFamily="2" charset="-78"/>
                 <a:cs typeface="Amiri" pitchFamily="2" charset="-78"/>
               </a:rPr>
               <a:t>الاسْتِمَارَةُ</a:t>
@@ -15706,6 +15801,7 @@
                   <a:srgbClr val="1E6B52"/>
                 </a:solidFill>
                 <a:latin typeface="Amiri" pitchFamily="2" charset="-78"/>
+                <a:ea typeface="Amiri" pitchFamily="2" charset="-78"/>
                 <a:cs typeface="Amiri" pitchFamily="2" charset="-78"/>
               </a:rPr>
               <a:t>الرِّسَالَةُ</a:t>
@@ -15982,6 +16078,7 @@
                   <a:srgbClr val="1E6B52"/>
                 </a:solidFill>
                 <a:latin typeface="Amiri" pitchFamily="2" charset="-78"/>
+                <a:ea typeface="Amiri" pitchFamily="2" charset="-78"/>
                 <a:cs typeface="Amiri" pitchFamily="2" charset="-78"/>
               </a:rPr>
               <a:t>المَقَالُ</a:t>
@@ -16258,6 +16355,7 @@
                   <a:srgbClr val="8A6D1E"/>
                 </a:solidFill>
                 <a:latin typeface="Amiri" pitchFamily="2" charset="-78"/>
+                <a:ea typeface="Amiri" pitchFamily="2" charset="-78"/>
                 <a:cs typeface="Amiri" pitchFamily="2" charset="-78"/>
               </a:rPr>
               <a:t>قَيِّمْ</a:t>
@@ -16501,6 +16599,7 @@
                   <a:srgbClr val="D4AF37"/>
                 </a:solidFill>
                 <a:latin typeface="Amiri" pitchFamily="2" charset="-78"/>
+                <a:ea typeface="Amiri" pitchFamily="2" charset="-78"/>
                 <a:cs typeface="Amiri" pitchFamily="2" charset="-78"/>
               </a:rPr>
               <a:t>م</a:t>
@@ -16821,6 +16920,7 @@
                   <a:srgbClr val="8A6D1E"/>
                 </a:solidFill>
                 <a:latin typeface="Amiri" pitchFamily="2" charset="-78"/>
+                <a:ea typeface="Amiri" pitchFamily="2" charset="-78"/>
                 <a:cs typeface="Amiri" pitchFamily="2" charset="-78"/>
               </a:rPr>
               <a:t>امْتِحَانُ الكِتَابَةِ</a:t>
@@ -17445,6 +17545,7 @@
                   <a:srgbClr val="1B3B6F"/>
                 </a:solidFill>
                 <a:latin typeface="Amiri" pitchFamily="2" charset="-78"/>
+                <a:ea typeface="Amiri" pitchFamily="2" charset="-78"/>
                 <a:cs typeface="Amiri" pitchFamily="2" charset="-78"/>
               </a:rPr>
               <a:t>يَقَعُ اليَمَنُ فِي جَنُوبِ شِبْهِ الجَزِيرَةِ العَرَبِيَّةِ</a:t>
@@ -17544,6 +17645,7 @@
                   <a:srgbClr val="1B3B6F"/>
                 </a:solidFill>
                 <a:latin typeface="Amiri" pitchFamily="2" charset="-78"/>
+                <a:ea typeface="Amiri" pitchFamily="2" charset="-78"/>
                 <a:cs typeface="Amiri" pitchFamily="2" charset="-78"/>
               </a:rPr>
               <a:t>هُوَ مَغْرِبِيٌّ، وَهِيَ مِصْرِيَّةٌ</a:t>
@@ -17643,6 +17745,7 @@
                   <a:srgbClr val="1B3B6F"/>
                 </a:solidFill>
                 <a:latin typeface="Amiri" pitchFamily="2" charset="-78"/>
+                <a:ea typeface="Amiri" pitchFamily="2" charset="-78"/>
                 <a:cs typeface="Amiri" pitchFamily="2" charset="-78"/>
               </a:rPr>
               <a:t>المَغْرِبُ أَكْبَرُ مِنْ بِرِيطَانِيَا، لٰكِنَّ …</a:t>
@@ -17814,6 +17917,7 @@
                   <a:srgbClr val="D4AF37"/>
                 </a:solidFill>
                 <a:latin typeface="Amiri" pitchFamily="2" charset="-78"/>
+                <a:ea typeface="Amiri" pitchFamily="2" charset="-78"/>
                 <a:cs typeface="Amiri" pitchFamily="2" charset="-78"/>
               </a:rPr>
               <a:t>م</a:t>
@@ -18134,6 +18238,7 @@
                   <a:srgbClr val="8A6D1E"/>
                 </a:solidFill>
                 <a:latin typeface="Amiri" pitchFamily="2" charset="-78"/>
+                <a:ea typeface="Amiri" pitchFamily="2" charset="-78"/>
                 <a:cs typeface="Amiri" pitchFamily="2" charset="-78"/>
               </a:rPr>
               <a:t>التَّسْجِيلُ فِي المُخَيَّمِ الدَّوْلِيِّ</a:t>
@@ -18490,6 +18595,7 @@
                   <a:srgbClr val="1B3B6F"/>
                 </a:solidFill>
                 <a:latin typeface="Amiri" pitchFamily="2" charset="-78"/>
+                <a:ea typeface="Amiri" pitchFamily="2" charset="-78"/>
                 <a:cs typeface="Amiri" pitchFamily="2" charset="-78"/>
               </a:rPr>
               <a:t>الاسْمُ</a:t>
@@ -18734,6 +18840,7 @@
                   <a:srgbClr val="1B3B6F"/>
                 </a:solidFill>
                 <a:latin typeface="Amiri" pitchFamily="2" charset="-78"/>
+                <a:ea typeface="Amiri" pitchFamily="2" charset="-78"/>
                 <a:cs typeface="Amiri" pitchFamily="2" charset="-78"/>
               </a:rPr>
               <a:t>الجِنْسِيَّةُ</a:t>
@@ -18978,6 +19085,7 @@
                   <a:srgbClr val="1B3B6F"/>
                 </a:solidFill>
                 <a:latin typeface="Amiri" pitchFamily="2" charset="-78"/>
+                <a:ea typeface="Amiri" pitchFamily="2" charset="-78"/>
                 <a:cs typeface="Amiri" pitchFamily="2" charset="-78"/>
               </a:rPr>
               <a:t>البَلَدُ وَالمَدِينَةُ</a:t>
@@ -19222,6 +19330,7 @@
                   <a:srgbClr val="1B3B6F"/>
                 </a:solidFill>
                 <a:latin typeface="Amiri" pitchFamily="2" charset="-78"/>
+                <a:ea typeface="Amiri" pitchFamily="2" charset="-78"/>
                 <a:cs typeface="Amiri" pitchFamily="2" charset="-78"/>
               </a:rPr>
               <a:t>أَيْنَ تَقَعُ مَدِينَتُكَ؟</a:t>
@@ -19466,6 +19575,7 @@
                   <a:srgbClr val="1B3B6F"/>
                 </a:solidFill>
                 <a:latin typeface="Amiri" pitchFamily="2" charset="-78"/>
+                <a:ea typeface="Amiri" pitchFamily="2" charset="-78"/>
                 <a:cs typeface="Amiri" pitchFamily="2" charset="-78"/>
               </a:rPr>
               <a:t>أَصْلُ العَائِلَةِ</a:t>
@@ -19710,6 +19820,7 @@
                   <a:srgbClr val="1B3B6F"/>
                 </a:solidFill>
                 <a:latin typeface="Amiri" pitchFamily="2" charset="-78"/>
+                <a:ea typeface="Amiri" pitchFamily="2" charset="-78"/>
                 <a:cs typeface="Amiri" pitchFamily="2" charset="-78"/>
               </a:rPr>
               <a:t>اللُّغَاتُ</a:t>
@@ -19954,6 +20065,7 @@
                   <a:srgbClr val="1B3B6F"/>
                 </a:solidFill>
                 <a:latin typeface="Amiri" pitchFamily="2" charset="-78"/>
+                <a:ea typeface="Amiri" pitchFamily="2" charset="-78"/>
                 <a:cs typeface="Amiri" pitchFamily="2" charset="-78"/>
               </a:rPr>
               <a:t>بَلَدٌ زُرْتَهُ</a:t>
@@ -20133,6 +20245,7 @@
                   <a:srgbClr val="1B3B6F"/>
                 </a:solidFill>
                 <a:latin typeface="Amiri" pitchFamily="2" charset="-78"/>
+                <a:ea typeface="Amiri" pitchFamily="2" charset="-78"/>
                 <a:cs typeface="Amiri" pitchFamily="2" charset="-78"/>
               </a:rPr>
               <a:t>جُمْلَةٌ: لِمَاذَا تُرِيدُ أَنْ تُشَارِكَ؟</a:t>
@@ -20342,6 +20455,7 @@
                   <a:srgbClr val="D4AF37"/>
                 </a:solidFill>
                 <a:latin typeface="Amiri" pitchFamily="2" charset="-78"/>
+                <a:ea typeface="Amiri" pitchFamily="2" charset="-78"/>
                 <a:cs typeface="Amiri" pitchFamily="2" charset="-78"/>
               </a:rPr>
               <a:t>م</a:t>
@@ -20662,6 +20776,7 @@
                   <a:srgbClr val="8A6D1E"/>
                 </a:solidFill>
                 <a:latin typeface="Amiri" pitchFamily="2" charset="-78"/>
+                <a:ea typeface="Amiri" pitchFamily="2" charset="-78"/>
                 <a:cs typeface="Amiri" pitchFamily="2" charset="-78"/>
               </a:rPr>
               <a:t>نَمُوذَجُ الإِجَابَةِ</a:t>
@@ -20980,6 +21095,7 @@
                   <a:srgbClr val="1B3B6F"/>
                 </a:solidFill>
                 <a:latin typeface="Amiri" pitchFamily="2" charset="-78"/>
+                <a:ea typeface="Amiri" pitchFamily="2" charset="-78"/>
                 <a:cs typeface="Amiri" pitchFamily="2" charset="-78"/>
               </a:rPr>
               <a:t>آدَمُ سَعِيدٌ</a:t>
@@ -21018,6 +21134,7 @@
                   <a:srgbClr val="1B3B6F"/>
                 </a:solidFill>
                 <a:latin typeface="Amiri" pitchFamily="2" charset="-78"/>
+                <a:ea typeface="Amiri" pitchFamily="2" charset="-78"/>
                 <a:cs typeface="Amiri" pitchFamily="2" charset="-78"/>
               </a:rPr>
               <a:t>الاسْمُ</a:t>
@@ -21159,6 +21276,7 @@
                   <a:srgbClr val="1B3B6F"/>
                 </a:solidFill>
                 <a:latin typeface="Amiri" pitchFamily="2" charset="-78"/>
+                <a:ea typeface="Amiri" pitchFamily="2" charset="-78"/>
                 <a:cs typeface="Amiri" pitchFamily="2" charset="-78"/>
               </a:rPr>
               <a:t>بِرِيطَانِيٌّ</a:t>
@@ -21197,6 +21315,7 @@
                   <a:srgbClr val="1B3B6F"/>
                 </a:solidFill>
                 <a:latin typeface="Amiri" pitchFamily="2" charset="-78"/>
+                <a:ea typeface="Amiri" pitchFamily="2" charset="-78"/>
                 <a:cs typeface="Amiri" pitchFamily="2" charset="-78"/>
               </a:rPr>
               <a:t>الجِنْسِيَّةُ</a:t>
@@ -21338,6 +21457,7 @@
                   <a:srgbClr val="1B3B6F"/>
                 </a:solidFill>
                 <a:latin typeface="Amiri" pitchFamily="2" charset="-78"/>
+                <a:ea typeface="Amiri" pitchFamily="2" charset="-78"/>
                 <a:cs typeface="Amiri" pitchFamily="2" charset="-78"/>
               </a:rPr>
               <a:t>إِنْجِلْتِرَا، بِرْمِنْغْهَامُ</a:t>
@@ -21376,6 +21496,7 @@
                   <a:srgbClr val="1B3B6F"/>
                 </a:solidFill>
                 <a:latin typeface="Amiri" pitchFamily="2" charset="-78"/>
+                <a:ea typeface="Amiri" pitchFamily="2" charset="-78"/>
                 <a:cs typeface="Amiri" pitchFamily="2" charset="-78"/>
               </a:rPr>
               <a:t>البَلَدُ وَالمَدِينَةُ</a:t>
@@ -21517,6 +21638,7 @@
                   <a:srgbClr val="1B3B6F"/>
                 </a:solidFill>
                 <a:latin typeface="Amiri" pitchFamily="2" charset="-78"/>
+                <a:ea typeface="Amiri" pitchFamily="2" charset="-78"/>
                 <a:cs typeface="Amiri" pitchFamily="2" charset="-78"/>
               </a:rPr>
               <a:t>فِي وَسَطِ إِنْجِلْتِرَا</a:t>
@@ -21555,6 +21677,7 @@
                   <a:srgbClr val="1B3B6F"/>
                 </a:solidFill>
                 <a:latin typeface="Amiri" pitchFamily="2" charset="-78"/>
+                <a:ea typeface="Amiri" pitchFamily="2" charset="-78"/>
                 <a:cs typeface="Amiri" pitchFamily="2" charset="-78"/>
               </a:rPr>
               <a:t>أَيْنَ تَقَعُ مَدِينَتُكَ؟</a:t>
@@ -21696,6 +21819,7 @@
                   <a:srgbClr val="1B3B6F"/>
                 </a:solidFill>
                 <a:latin typeface="Amiri" pitchFamily="2" charset="-78"/>
+                <a:ea typeface="Amiri" pitchFamily="2" charset="-78"/>
                 <a:cs typeface="Amiri" pitchFamily="2" charset="-78"/>
               </a:rPr>
               <a:t>اليَمَنُ</a:t>
@@ -21734,6 +21858,7 @@
                   <a:srgbClr val="1B3B6F"/>
                 </a:solidFill>
                 <a:latin typeface="Amiri" pitchFamily="2" charset="-78"/>
+                <a:ea typeface="Amiri" pitchFamily="2" charset="-78"/>
                 <a:cs typeface="Amiri" pitchFamily="2" charset="-78"/>
               </a:rPr>
               <a:t>أَصْلُ العَائِلَةِ</a:t>
@@ -21875,6 +22000,7 @@
                   <a:srgbClr val="1B3B6F"/>
                 </a:solidFill>
                 <a:latin typeface="Amiri" pitchFamily="2" charset="-78"/>
+                <a:ea typeface="Amiri" pitchFamily="2" charset="-78"/>
                 <a:cs typeface="Amiri" pitchFamily="2" charset="-78"/>
               </a:rPr>
               <a:t>الإِنْجِلِيزِيَّةُ وَالعَرَبِيَّةُ</a:t>
@@ -21913,6 +22039,7 @@
                   <a:srgbClr val="1B3B6F"/>
                 </a:solidFill>
                 <a:latin typeface="Amiri" pitchFamily="2" charset="-78"/>
+                <a:ea typeface="Amiri" pitchFamily="2" charset="-78"/>
                 <a:cs typeface="Amiri" pitchFamily="2" charset="-78"/>
               </a:rPr>
               <a:t>اللُّغَاتُ</a:t>
@@ -22054,6 +22181,7 @@
                   <a:srgbClr val="1B3B6F"/>
                 </a:solidFill>
                 <a:latin typeface="Amiri" pitchFamily="2" charset="-78"/>
+                <a:ea typeface="Amiri" pitchFamily="2" charset="-78"/>
                 <a:cs typeface="Amiri" pitchFamily="2" charset="-78"/>
               </a:rPr>
               <a:t>عُمَانُ، فِي شَرْقِ شِبْهِ الجَزِيرَةِ العَرَبِيَّةِ</a:t>
@@ -22092,6 +22220,7 @@
                   <a:srgbClr val="1B3B6F"/>
                 </a:solidFill>
                 <a:latin typeface="Amiri" pitchFamily="2" charset="-78"/>
+                <a:ea typeface="Amiri" pitchFamily="2" charset="-78"/>
                 <a:cs typeface="Amiri" pitchFamily="2" charset="-78"/>
               </a:rPr>
               <a:t>بَلَدٌ زُرْتَهُ</a:t>
@@ -22233,6 +22362,7 @@
                   <a:srgbClr val="1B3B6F"/>
                 </a:solidFill>
                 <a:latin typeface="Amiri" pitchFamily="2" charset="-78"/>
+                <a:ea typeface="Amiri" pitchFamily="2" charset="-78"/>
                 <a:cs typeface="Amiri" pitchFamily="2" charset="-78"/>
               </a:rPr>
               <a:t>أُرِيدُ أَنْ أُشَارِكَ لِكَيْ أَتَعَرَّفَ عَلَى شَبَابٍ مِنْ قَارَّاتٍ مُخْتَلِفَةٍ.</a:t>
@@ -22271,6 +22401,7 @@
                   <a:srgbClr val="1B3B6F"/>
                 </a:solidFill>
                 <a:latin typeface="Amiri" pitchFamily="2" charset="-78"/>
+                <a:ea typeface="Amiri" pitchFamily="2" charset="-78"/>
                 <a:cs typeface="Amiri" pitchFamily="2" charset="-78"/>
               </a:rPr>
               <a:t>جُمْلَةٌ: لِمَاذَا تُرِيدُ أَنْ تُشَارِكَ؟</a:t>
@@ -22480,6 +22611,7 @@
                   <a:srgbClr val="D4AF37"/>
                 </a:solidFill>
                 <a:latin typeface="Amiri" pitchFamily="2" charset="-78"/>
+                <a:ea typeface="Amiri" pitchFamily="2" charset="-78"/>
                 <a:cs typeface="Amiri" pitchFamily="2" charset="-78"/>
               </a:rPr>
               <a:t>م</a:t>
@@ -22800,6 +22932,7 @@
                   <a:srgbClr val="8A6D1E"/>
                 </a:solidFill>
                 <a:latin typeface="Amiri" pitchFamily="2" charset="-78"/>
+                <a:ea typeface="Amiri" pitchFamily="2" charset="-78"/>
                 <a:cs typeface="Amiri" pitchFamily="2" charset="-78"/>
               </a:rPr>
               <a:t>رِسَالَةٌ مِنَ المُخَيَّمِ الدَّوْلِيِّ</a:t>
@@ -23275,6 +23408,7 @@
                   <a:srgbClr val="1B3B6F"/>
                 </a:solidFill>
                 <a:latin typeface="Amiri" pitchFamily="2" charset="-78"/>
+                <a:ea typeface="Amiri" pitchFamily="2" charset="-78"/>
                 <a:cs typeface="Amiri" pitchFamily="2" charset="-78"/>
               </a:rPr>
               <a:t>أَنَا فِي … فِي شَمَالِ …</a:t>
@@ -23351,6 +23485,7 @@
                   <a:srgbClr val="1B3B6F"/>
                 </a:solidFill>
                 <a:latin typeface="Amiri" pitchFamily="2" charset="-78"/>
+                <a:ea typeface="Amiri" pitchFamily="2" charset="-78"/>
                 <a:cs typeface="Amiri" pitchFamily="2" charset="-78"/>
               </a:rPr>
               <a:t>هُوَ مَغْرِبِيٌّ مِنْ …</a:t>
@@ -23427,6 +23562,7 @@
                   <a:srgbClr val="1B3B6F"/>
                 </a:solidFill>
                 <a:latin typeface="Amiri" pitchFamily="2" charset="-78"/>
+                <a:ea typeface="Amiri" pitchFamily="2" charset="-78"/>
                 <a:cs typeface="Amiri" pitchFamily="2" charset="-78"/>
               </a:rPr>
               <a:t>هِيَ مِصْرِيَّةٌ مِنْ …</a:t>
@@ -23503,6 +23639,7 @@
                   <a:srgbClr val="1B3B6F"/>
                 </a:solidFill>
                 <a:latin typeface="Amiri" pitchFamily="2" charset="-78"/>
+                <a:ea typeface="Amiri" pitchFamily="2" charset="-78"/>
                 <a:cs typeface="Amiri" pitchFamily="2" charset="-78"/>
               </a:rPr>
               <a:t>سَأَزُورُهُ فِي …</a:t>
@@ -23674,6 +23811,7 @@
                   <a:srgbClr val="D4AF37"/>
                 </a:solidFill>
                 <a:latin typeface="Amiri" pitchFamily="2" charset="-78"/>
+                <a:ea typeface="Amiri" pitchFamily="2" charset="-78"/>
                 <a:cs typeface="Amiri" pitchFamily="2" charset="-78"/>
               </a:rPr>
               <a:t>م</a:t>
@@ -23994,6 +24132,7 @@
                   <a:srgbClr val="8A6D1E"/>
                 </a:solidFill>
                 <a:latin typeface="Amiri" pitchFamily="2" charset="-78"/>
+                <a:ea typeface="Amiri" pitchFamily="2" charset="-78"/>
                 <a:cs typeface="Amiri" pitchFamily="2" charset="-78"/>
               </a:rPr>
               <a:t>نَصُّ السُّؤَالِ</a:t>
@@ -24274,6 +24413,7 @@
                   <a:srgbClr val="1B3B6F"/>
                 </a:solidFill>
                 <a:latin typeface="Amiri" pitchFamily="2" charset="-78"/>
+                <a:ea typeface="Amiri" pitchFamily="2" charset="-78"/>
                 <a:cs typeface="Amiri" pitchFamily="2" charset="-78"/>
               </a:rPr>
               <a:t>أَنْتَ فِي مُخَيَّمٍ دَوْلِيٍّ لِلشَّبَابِ. اكْتُبْ رِسَالَةً إِلَى صَدِيقِكَ (٨٠–٩٠ كَلِمَةً).</a:t>
@@ -24415,6 +24555,7 @@
                   <a:srgbClr val="1B3B6F"/>
                 </a:solidFill>
                 <a:latin typeface="Amiri" pitchFamily="2" charset="-78"/>
+                <a:ea typeface="Amiri" pitchFamily="2" charset="-78"/>
                 <a:cs typeface="Amiri" pitchFamily="2" charset="-78"/>
               </a:rPr>
               <a:t>أَيْنَ يَقَعُ المُخَيَّمُ؟</a:t>
@@ -24556,6 +24697,7 @@
                   <a:srgbClr val="1B3B6F"/>
                 </a:solidFill>
                 <a:latin typeface="Amiri" pitchFamily="2" charset="-78"/>
+                <a:ea typeface="Amiri" pitchFamily="2" charset="-78"/>
                 <a:cs typeface="Amiri" pitchFamily="2" charset="-78"/>
               </a:rPr>
               <a:t>صِفْ صَدِيقَيْنِ جَدِيدَيْنِ: جِنْسِيَّتُهُمَا وَبَلَدُهُمَا.</a:t>
@@ -24697,6 +24839,7 @@
                   <a:srgbClr val="1B3B6F"/>
                 </a:solidFill>
                 <a:latin typeface="Amiri" pitchFamily="2" charset="-78"/>
+                <a:ea typeface="Amiri" pitchFamily="2" charset="-78"/>
                 <a:cs typeface="Amiri" pitchFamily="2" charset="-78"/>
               </a:rPr>
               <a:t>مَاذَا فَعَلْتَ أَمْسِ؟</a:t>
@@ -24838,6 +24981,7 @@
                   <a:srgbClr val="1B3B6F"/>
                 </a:solidFill>
                 <a:latin typeface="Amiri" pitchFamily="2" charset="-78"/>
+                <a:ea typeface="Amiri" pitchFamily="2" charset="-78"/>
                 <a:cs typeface="Amiri" pitchFamily="2" charset="-78"/>
               </a:rPr>
               <a:t>مَا رَأْيُكَ فِي المُخَيَّمِ؟ وَمَا خُطَّتُكَ لِلْمُسْتَقْبَلِ؟</a:t>
@@ -25047,6 +25191,7 @@
                   <a:srgbClr val="D4AF37"/>
                 </a:solidFill>
                 <a:latin typeface="Amiri" pitchFamily="2" charset="-78"/>
+                <a:ea typeface="Amiri" pitchFamily="2" charset="-78"/>
                 <a:cs typeface="Amiri" pitchFamily="2" charset="-78"/>
               </a:rPr>
               <a:t>م</a:t>
@@ -25367,6 +25512,7 @@
                   <a:srgbClr val="8A6D1E"/>
                 </a:solidFill>
                 <a:latin typeface="Amiri" pitchFamily="2" charset="-78"/>
+                <a:ea typeface="Amiri" pitchFamily="2" charset="-78"/>
                 <a:cs typeface="Amiri" pitchFamily="2" charset="-78"/>
               </a:rPr>
               <a:t>قَوَالِبُ الكِتَابَةِ</a:t>
@@ -25647,6 +25793,7 @@
                   <a:srgbClr val="1B3B6F"/>
                 </a:solidFill>
                 <a:latin typeface="Amiri" pitchFamily="2" charset="-78"/>
+                <a:ea typeface="Amiri" pitchFamily="2" charset="-78"/>
                 <a:cs typeface="Amiri" pitchFamily="2" charset="-78"/>
               </a:rPr>
               <a:t>مَرْحَبًا يَا ______ ، كَيْفَ حَالُكَ؟</a:t>
@@ -25853,6 +26000,7 @@
                   <a:srgbClr val="1B3B6F"/>
                 </a:solidFill>
                 <a:latin typeface="Amiri" pitchFamily="2" charset="-78"/>
+                <a:ea typeface="Amiri" pitchFamily="2" charset="-78"/>
                 <a:cs typeface="Amiri" pitchFamily="2" charset="-78"/>
               </a:rPr>
               <a:t>أَنَا الآنَ فِي مُخَيَّمٍ فِي ______ ، فِي شَمَالِ / جَنُوبِ ______ .</a:t>
@@ -26059,6 +26207,7 @@
                   <a:srgbClr val="1B3B6F"/>
                 </a:solidFill>
                 <a:latin typeface="Amiri" pitchFamily="2" charset="-78"/>
+                <a:ea typeface="Amiri" pitchFamily="2" charset="-78"/>
                 <a:cs typeface="Amiri" pitchFamily="2" charset="-78"/>
               </a:rPr>
               <a:t>صَدِيقِي الجَدِيدُ ______ ، وَهُوَ ______ . وَصَدِيقَتِي ______ ، وَهِيَ ______ .</a:t>
@@ -26265,6 +26414,7 @@
                   <a:srgbClr val="1B3B6F"/>
                 </a:solidFill>
                 <a:latin typeface="Amiri" pitchFamily="2" charset="-78"/>
+                <a:ea typeface="Amiri" pitchFamily="2" charset="-78"/>
                 <a:cs typeface="Amiri" pitchFamily="2" charset="-78"/>
               </a:rPr>
               <a:t>أَمْسِ ______ مَعًا.</a:t>
@@ -26471,6 +26621,7 @@
                   <a:srgbClr val="1B3B6F"/>
                 </a:solidFill>
                 <a:latin typeface="Amiri" pitchFamily="2" charset="-78"/>
+                <a:ea typeface="Amiri" pitchFamily="2" charset="-78"/>
                 <a:cs typeface="Amiri" pitchFamily="2" charset="-78"/>
               </a:rPr>
               <a:t>المُخَيَّمُ ______ . فِي المُسْتَقْبَلِ سَأَزُورُ ______ .</a:t>
@@ -26677,6 +26828,7 @@
                   <a:srgbClr val="1B3B6F"/>
                 </a:solidFill>
                 <a:latin typeface="Amiri" pitchFamily="2" charset="-78"/>
+                <a:ea typeface="Amiri" pitchFamily="2" charset="-78"/>
                 <a:cs typeface="Amiri" pitchFamily="2" charset="-78"/>
               </a:rPr>
               <a:t>مَعَ السَّلَامَةِ، ______</a:t>
@@ -26916,13 +27068,9 @@
     <a:fontScheme name="Office">
       <a:majorFont>
         <a:latin typeface="Calibri Light" panose="020F0302020204030204"/>
-        <a:ea typeface=""/>
-        <a:cs typeface=""/>
-        <a:font script="Jpan" typeface="游ゴシック Light"/>
-        <a:font script="Hang" typeface="맑은 고딕"/>
-        <a:font script="Hans" typeface="等线 Light"/>
-        <a:font script="Hant" typeface="新細明體"/>
-        <a:font script="Arab" typeface="Times New Roman"/>
+        <a:ea typeface="Amiri" pitchFamily="2" charset="-78"/>
+        <a:cs typeface="Amiri" pitchFamily="2" charset="-78"/>
+        <a:font script="Arab" typeface="Amiri"/>
         <a:font script="Hebr" typeface="Times New Roman"/>
         <a:font script="Thai" typeface="Angsana New"/>
         <a:font script="Ethi" typeface="Nyala"/>
@@ -26968,13 +27116,9 @@
       </a:majorFont>
       <a:minorFont>
         <a:latin typeface="Calibri" panose="020F0502020204030204"/>
-        <a:ea typeface=""/>
-        <a:cs typeface=""/>
-        <a:font script="Jpan" typeface="游ゴシック"/>
-        <a:font script="Hang" typeface="맑은 고딕"/>
-        <a:font script="Hans" typeface="等线"/>
-        <a:font script="Hant" typeface="新細明體"/>
-        <a:font script="Arab" typeface="Arial"/>
+        <a:ea typeface="Amiri" pitchFamily="2" charset="-78"/>
+        <a:cs typeface="Amiri" pitchFamily="2" charset="-78"/>
+        <a:font script="Arab" typeface="Amiri"/>
         <a:font script="Hebr" typeface="Arial"/>
         <a:font script="Thai" typeface="Cordia New"/>
         <a:font script="Ethi" typeface="Nyala"/>

--- a/Topic_C/Exam_Practice/TC-L01_Writing_Workshop_People_Places_Compass_Points.pptx
+++ b/Topic_C/Exam_Practice/TC-L01_Writing_Workshop_People_Places_Compass_Points.pptx
@@ -3848,7 +3848,7 @@
                 <a:solidFill>
                   <a:srgbClr val="FFFFFF"/>
                 </a:solidFill>
-                <a:latin typeface="Calibri" pitchFamily="34" charset="0"/>
+                <a:latin typeface="Amiri" pitchFamily="2" charset="-78"/>
                 <a:ea typeface="Amiri" pitchFamily="2" charset="-78"/>
                 <a:cs typeface="Amiri" pitchFamily="2" charset="-78"/>
               </a:rPr>
@@ -3914,7 +3914,7 @@
                 <a:solidFill>
                   <a:srgbClr val="FFFFFF"/>
                 </a:solidFill>
-                <a:latin typeface="Calibri" pitchFamily="34" charset="0"/>
+                <a:latin typeface="Amiri" pitchFamily="2" charset="-78"/>
                 <a:ea typeface="Amiri" pitchFamily="2" charset="-78"/>
                 <a:cs typeface="Amiri" pitchFamily="2" charset="-78"/>
               </a:rPr>
@@ -3980,7 +3980,7 @@
                 <a:solidFill>
                   <a:srgbClr val="FFFFFF"/>
                 </a:solidFill>
-                <a:latin typeface="Calibri" pitchFamily="34" charset="0"/>
+                <a:latin typeface="Amiri" pitchFamily="2" charset="-78"/>
                 <a:ea typeface="Amiri" pitchFamily="2" charset="-78"/>
                 <a:cs typeface="Amiri" pitchFamily="2" charset="-78"/>
               </a:rPr>
@@ -4046,7 +4046,7 @@
                 <a:solidFill>
                   <a:srgbClr val="FFFFFF"/>
                 </a:solidFill>
-                <a:latin typeface="Calibri" pitchFamily="34" charset="0"/>
+                <a:latin typeface="Amiri" pitchFamily="2" charset="-78"/>
                 <a:ea typeface="Amiri" pitchFamily="2" charset="-78"/>
                 <a:cs typeface="Amiri" pitchFamily="2" charset="-78"/>
               </a:rPr>
@@ -4844,7 +4844,7 @@
                 <a:solidFill>
                   <a:srgbClr val="FFFFFF"/>
                 </a:solidFill>
-                <a:latin typeface="Calibri" pitchFamily="34" charset="0"/>
+                <a:latin typeface="Amiri" pitchFamily="2" charset="-78"/>
                 <a:ea typeface="Amiri" pitchFamily="2" charset="-78"/>
                 <a:cs typeface="Amiri" pitchFamily="2" charset="-78"/>
               </a:rPr>
@@ -4910,7 +4910,7 @@
                 <a:solidFill>
                   <a:srgbClr val="FFFFFF"/>
                 </a:solidFill>
-                <a:latin typeface="Calibri" pitchFamily="34" charset="0"/>
+                <a:latin typeface="Amiri" pitchFamily="2" charset="-78"/>
                 <a:ea typeface="Amiri" pitchFamily="2" charset="-78"/>
                 <a:cs typeface="Amiri" pitchFamily="2" charset="-78"/>
               </a:rPr>
@@ -4976,7 +4976,7 @@
                 <a:solidFill>
                   <a:srgbClr val="FFFFFF"/>
                 </a:solidFill>
-                <a:latin typeface="Calibri" pitchFamily="34" charset="0"/>
+                <a:latin typeface="Amiri" pitchFamily="2" charset="-78"/>
                 <a:ea typeface="Amiri" pitchFamily="2" charset="-78"/>
                 <a:cs typeface="Amiri" pitchFamily="2" charset="-78"/>
               </a:rPr>
@@ -5042,7 +5042,7 @@
                 <a:solidFill>
                   <a:srgbClr val="FFFFFF"/>
                 </a:solidFill>
-                <a:latin typeface="Calibri" pitchFamily="34" charset="0"/>
+                <a:latin typeface="Amiri" pitchFamily="2" charset="-78"/>
                 <a:ea typeface="Amiri" pitchFamily="2" charset="-78"/>
                 <a:cs typeface="Amiri" pitchFamily="2" charset="-78"/>
               </a:rPr>
@@ -8602,7 +8602,7 @@
                 <a:solidFill>
                   <a:srgbClr val="FFFFFF"/>
                 </a:solidFill>
-                <a:latin typeface="Calibri" pitchFamily="34" charset="0"/>
+                <a:latin typeface="Amiri" pitchFamily="2" charset="-78"/>
                 <a:ea typeface="Amiri" pitchFamily="2" charset="-78"/>
                 <a:cs typeface="Amiri" pitchFamily="2" charset="-78"/>
               </a:rPr>
@@ -8668,7 +8668,7 @@
                 <a:solidFill>
                   <a:srgbClr val="FFFFFF"/>
                 </a:solidFill>
-                <a:latin typeface="Calibri" pitchFamily="34" charset="0"/>
+                <a:latin typeface="Amiri" pitchFamily="2" charset="-78"/>
                 <a:ea typeface="Amiri" pitchFamily="2" charset="-78"/>
                 <a:cs typeface="Amiri" pitchFamily="2" charset="-78"/>
               </a:rPr>
@@ -8734,7 +8734,7 @@
                 <a:solidFill>
                   <a:srgbClr val="FFFFFF"/>
                 </a:solidFill>
-                <a:latin typeface="Calibri" pitchFamily="34" charset="0"/>
+                <a:latin typeface="Amiri" pitchFamily="2" charset="-78"/>
                 <a:ea typeface="Amiri" pitchFamily="2" charset="-78"/>
                 <a:cs typeface="Amiri" pitchFamily="2" charset="-78"/>
               </a:rPr>
@@ -8800,7 +8800,7 @@
                 <a:solidFill>
                   <a:srgbClr val="FFFFFF"/>
                 </a:solidFill>
-                <a:latin typeface="Calibri" pitchFamily="34" charset="0"/>
+                <a:latin typeface="Amiri" pitchFamily="2" charset="-78"/>
                 <a:ea typeface="Amiri" pitchFamily="2" charset="-78"/>
                 <a:cs typeface="Amiri" pitchFamily="2" charset="-78"/>
               </a:rPr>
@@ -9587,7 +9587,7 @@
                 <a:solidFill>
                   <a:srgbClr val="FFFFFF"/>
                 </a:solidFill>
-                <a:latin typeface="Calibri" pitchFamily="34" charset="0"/>
+                <a:latin typeface="Amiri" pitchFamily="2" charset="-78"/>
                 <a:ea typeface="Amiri" pitchFamily="2" charset="-78"/>
                 <a:cs typeface="Amiri" pitchFamily="2" charset="-78"/>
               </a:rPr>
@@ -9653,7 +9653,7 @@
                 <a:solidFill>
                   <a:srgbClr val="FFFFFF"/>
                 </a:solidFill>
-                <a:latin typeface="Calibri" pitchFamily="34" charset="0"/>
+                <a:latin typeface="Amiri" pitchFamily="2" charset="-78"/>
                 <a:ea typeface="Amiri" pitchFamily="2" charset="-78"/>
                 <a:cs typeface="Amiri" pitchFamily="2" charset="-78"/>
               </a:rPr>
@@ -9719,7 +9719,7 @@
                 <a:solidFill>
                   <a:srgbClr val="FFFFFF"/>
                 </a:solidFill>
-                <a:latin typeface="Calibri" pitchFamily="34" charset="0"/>
+                <a:latin typeface="Amiri" pitchFamily="2" charset="-78"/>
                 <a:ea typeface="Amiri" pitchFamily="2" charset="-78"/>
                 <a:cs typeface="Amiri" pitchFamily="2" charset="-78"/>
               </a:rPr>
@@ -9785,7 +9785,7 @@
                 <a:solidFill>
                   <a:srgbClr val="FFFFFF"/>
                 </a:solidFill>
-                <a:latin typeface="Calibri" pitchFamily="34" charset="0"/>
+                <a:latin typeface="Amiri" pitchFamily="2" charset="-78"/>
                 <a:ea typeface="Amiri" pitchFamily="2" charset="-78"/>
                 <a:cs typeface="Amiri" pitchFamily="2" charset="-78"/>
               </a:rPr>
@@ -10572,7 +10572,7 @@
                 <a:solidFill>
                   <a:srgbClr val="FFFFFF"/>
                 </a:solidFill>
-                <a:latin typeface="Calibri" pitchFamily="34" charset="0"/>
+                <a:latin typeface="Amiri" pitchFamily="2" charset="-78"/>
                 <a:ea typeface="Amiri" pitchFamily="2" charset="-78"/>
                 <a:cs typeface="Amiri" pitchFamily="2" charset="-78"/>
               </a:rPr>
@@ -10638,7 +10638,7 @@
                 <a:solidFill>
                   <a:srgbClr val="FFFFFF"/>
                 </a:solidFill>
-                <a:latin typeface="Calibri" pitchFamily="34" charset="0"/>
+                <a:latin typeface="Amiri" pitchFamily="2" charset="-78"/>
                 <a:ea typeface="Amiri" pitchFamily="2" charset="-78"/>
                 <a:cs typeface="Amiri" pitchFamily="2" charset="-78"/>
               </a:rPr>
@@ -10704,7 +10704,7 @@
                 <a:solidFill>
                   <a:srgbClr val="FFFFFF"/>
                 </a:solidFill>
-                <a:latin typeface="Calibri" pitchFamily="34" charset="0"/>
+                <a:latin typeface="Amiri" pitchFamily="2" charset="-78"/>
                 <a:ea typeface="Amiri" pitchFamily="2" charset="-78"/>
                 <a:cs typeface="Amiri" pitchFamily="2" charset="-78"/>
               </a:rPr>
@@ -10770,7 +10770,7 @@
                 <a:solidFill>
                   <a:srgbClr val="FFFFFF"/>
                 </a:solidFill>
-                <a:latin typeface="Calibri" pitchFamily="34" charset="0"/>
+                <a:latin typeface="Amiri" pitchFamily="2" charset="-78"/>
                 <a:ea typeface="Amiri" pitchFamily="2" charset="-78"/>
                 <a:cs typeface="Amiri" pitchFamily="2" charset="-78"/>
               </a:rPr>
